--- a/hackathon_docs/CrossMind_Pitch_Deck.pptx
+++ b/hackathon_docs/CrossMind_Pitch_Deck.pptx
@@ -3090,7 +3090,7 @@
     <p:bg>
       <p:bgPr>
         <a:solidFill>
-          <a:srgbClr val="1A1A2E"/>
+          <a:srgbClr val="1E1E2E"/>
         </a:solidFill>
         <a:effectLst/>
       </p:bgPr>
@@ -3110,8 +3110,8 @@
         </p:nvSpPr>
         <p:spPr>
           <a:xfrm>
-            <a:off x="731520" y="548640"/>
-            <a:ext cx="10058400" cy="1097280"/>
+            <a:off x="731520" y="1371600"/>
+            <a:ext cx="10058400" cy="1828800"/>
           </a:xfrm>
           <a:prstGeom prst="rect">
             <a:avLst/>
@@ -3124,19 +3124,28 @@
           </a:bodyPr>
           <a:lstStyle/>
           <a:p>
-            <a:pPr>
-              <a:defRPr sz="3400" b="1">
+            <a:r>
+              <a:rPr sz="7200" b="1">
                 <a:solidFill>
                   <a:srgbClr val="FFFFFF"/>
                 </a:solidFill>
-              </a:defRPr>
-            </a:pPr>
-            <a:r>
-              <a:t>Every large organization wants AI.</a:t>
-            </a:r>
-            <a:br/>
-            <a:r>
-              <a:t>None of them want to export their data.</a:t>
+              </a:rPr>
+              <a:t>CrossMind</a:t>
+            </a:r>
+          </a:p>
+          <a:p>
+            <a:pPr>
+              <a:spcBef>
+                <a:spcPts val="800"/>
+              </a:spcBef>
+            </a:pPr>
+            <a:r>
+              <a:rPr sz="2400">
+                <a:solidFill>
+                  <a:srgbClr val="10B981"/>
+                </a:solidFill>
+              </a:rPr>
+              <a:t>Split inference for sensitive data</a:t>
             </a:r>
           </a:p>
         </p:txBody>
@@ -3149,8 +3158,8 @@
         </p:nvSpPr>
         <p:spPr>
           <a:xfrm>
-            <a:off x="731520" y="1828800"/>
-            <a:ext cx="10058400" cy="731520"/>
+            <a:off x="731520" y="3657600"/>
+            <a:ext cx="10058400" cy="3840480"/>
           </a:xfrm>
           <a:prstGeom prst="rect">
             <a:avLst/>
@@ -3164,14 +3173,92 @@
           <a:lstStyle/>
           <a:p>
             <a:pPr>
-              <a:defRPr sz="1800">
+              <a:spcBef>
+                <a:spcPts val="1400"/>
+              </a:spcBef>
+            </a:pPr>
+            <a:r>
+              <a:rPr sz="2000" b="1">
+                <a:solidFill>
+                  <a:srgbClr val="FFFFFF"/>
+                </a:solidFill>
+              </a:rPr>
+              <a:t>•  The problem</a:t>
+            </a:r>
+          </a:p>
+          <a:p>
+            <a:pPr>
+              <a:spcBef>
+                <a:spcPts val="400"/>
+              </a:spcBef>
+            </a:pPr>
+            <a:r>
+              <a:rPr sz="1600">
                 <a:solidFill>
                   <a:srgbClr val="CCCCCC"/>
                 </a:solidFill>
-              </a:defRPr>
-            </a:pPr>
-            <a:r>
-              <a:t>CrossMind — AI BEAVERS Founder Hackathon · June 6, 2026</a:t>
+              </a:rPr>
+              <a:t>    Large organizations need central AI models, but cannot export sensitive text to them. Today they either ban AI or accept full-text risk.</a:t>
+            </a:r>
+          </a:p>
+          <a:p>
+            <a:pPr>
+              <a:spcBef>
+                <a:spcPts val="1400"/>
+              </a:spcBef>
+            </a:pPr>
+            <a:r>
+              <a:rPr sz="2000" b="1">
+                <a:solidFill>
+                  <a:srgbClr val="FFFFFF"/>
+                </a:solidFill>
+              </a:rPr>
+              <a:t>•  The buyer</a:t>
+            </a:r>
+          </a:p>
+          <a:p>
+            <a:pPr>
+              <a:spcBef>
+                <a:spcPts val="400"/>
+              </a:spcBef>
+            </a:pPr>
+            <a:r>
+              <a:rPr sz="1600">
+                <a:solidFill>
+                  <a:srgbClr val="CCCCCC"/>
+                </a:solidFill>
+              </a:rPr>
+              <a:t>    Hospital-group IT, clinic compliance, enterprise AI leads: anyone blocking raw data export to a central model.</a:t>
+            </a:r>
+          </a:p>
+          <a:p>
+            <a:pPr>
+              <a:spcBef>
+                <a:spcPts val="1400"/>
+              </a:spcBef>
+            </a:pPr>
+            <a:r>
+              <a:rPr sz="2000" b="1">
+                <a:solidFill>
+                  <a:srgbClr val="FFFFFF"/>
+                </a:solidFill>
+              </a:rPr>
+              <a:t>•  Across domains</a:t>
+            </a:r>
+          </a:p>
+          <a:p>
+            <a:pPr>
+              <a:spcBef>
+                <a:spcPts val="400"/>
+              </a:spcBef>
+            </a:pPr>
+            <a:r>
+              <a:rPr sz="1600">
+                <a:solidFill>
+                  <a:srgbClr val="CCCCCC"/>
+                </a:solidFill>
+              </a:rPr>
+              <a:t>    Healthcare, finance, logistics, legal, industrial. For this hackathon: clinic to hospital.</a:t>
             </a:r>
           </a:p>
         </p:txBody>
@@ -3184,8 +3271,8 @@
         </p:nvSpPr>
         <p:spPr>
           <a:xfrm>
-            <a:off x="731520" y="2743200"/>
-            <a:ext cx="10058400" cy="3657600"/>
+            <a:off x="731520" y="6035040"/>
+            <a:ext cx="10058400" cy="457200"/>
           </a:xfrm>
           <a:prstGeom prst="rect">
             <a:avLst/>
@@ -3193,128 +3280,20 @@
           <a:noFill/>
         </p:spPr>
         <p:txBody>
-          <a:bodyPr wrap="square">
+          <a:bodyPr wrap="none">
             <a:spAutoFit/>
           </a:bodyPr>
           <a:lstStyle/>
           <a:p>
             <a:pPr>
-              <a:spcBef>
-                <a:spcPts val="1400"/>
-              </a:spcBef>
-            </a:pPr>
-            <a:r>
-              <a:rPr sz="2000" b="1">
-                <a:solidFill>
-                  <a:srgbClr val="FFFFFF"/>
-                </a:solidFill>
-              </a:rPr>
-              <a:t>•  The problem is universal</a:t>
-            </a:r>
-          </a:p>
-          <a:p>
-            <a:pPr>
-              <a:spcBef>
-                <a:spcPts val="400"/>
-              </a:spcBef>
-            </a:pPr>
-            <a:r>
-              <a:rPr sz="1600">
-                <a:solidFill>
-                  <a:srgbClr val="CCCCCC"/>
-                </a:solidFill>
-              </a:rPr>
-              <a:t>    Healthcare, finance, logistics, legal, industrial — sensitive text cannot leave the local network.</a:t>
-            </a:r>
-          </a:p>
-          <a:p>
-            <a:pPr>
-              <a:spcBef>
-                <a:spcPts val="1400"/>
-              </a:spcBef>
-            </a:pPr>
-            <a:r>
-              <a:rPr sz="2000" b="1">
-                <a:solidFill>
-                  <a:srgbClr val="FFFFFF"/>
-                </a:solidFill>
-              </a:rPr>
-              <a:t>•  The buyer</a:t>
-            </a:r>
-          </a:p>
-          <a:p>
-            <a:pPr>
-              <a:spcBef>
-                <a:spcPts val="400"/>
-              </a:spcBef>
-            </a:pPr>
-            <a:r>
-              <a:rPr sz="1600">
-                <a:solidFill>
-                  <a:srgbClr val="CCCCCC"/>
-                </a:solidFill>
-              </a:rPr>
-              <a:t>    Every organization with a large specialist model at HQ and smaller models at the edge.</a:t>
-            </a:r>
-          </a:p>
-          <a:p>
-            <a:pPr>
-              <a:spcBef>
-                <a:spcPts val="1400"/>
-              </a:spcBef>
-            </a:pPr>
-            <a:r>
-              <a:rPr sz="2000" b="1">
-                <a:solidFill>
-                  <a:srgbClr val="FFFFFF"/>
-                </a:solidFill>
-              </a:rPr>
-              <a:t>•  Today’s choice</a:t>
-            </a:r>
-          </a:p>
-          <a:p>
-            <a:pPr>
-              <a:spcBef>
-                <a:spcPts val="400"/>
-              </a:spcBef>
-            </a:pPr>
-            <a:r>
-              <a:rPr sz="1600">
-                <a:solidFill>
-                  <a:srgbClr val="CCCCCC"/>
-                </a:solidFill>
-              </a:rPr>
-              <a:t>    Ban AI entirely — or export full text to a cloud LLM and accept the audit nightmare.</a:t>
-            </a:r>
-          </a:p>
-          <a:p>
-            <a:pPr>
-              <a:spcBef>
-                <a:spcPts val="1400"/>
-              </a:spcBef>
-            </a:pPr>
-            <a:r>
-              <a:rPr sz="2000" b="1">
-                <a:solidFill>
-                  <a:srgbClr val="FFFFFF"/>
-                </a:solidFill>
-              </a:rPr>
-              <a:t>•  For this hackathon</a:t>
-            </a:r>
-          </a:p>
-          <a:p>
-            <a:pPr>
-              <a:spcBef>
-                <a:spcPts val="400"/>
-              </a:spcBef>
-            </a:pPr>
-            <a:r>
-              <a:rPr sz="1600">
-                <a:solidFill>
-                  <a:srgbClr val="CCCCCC"/>
-                </a:solidFill>
-              </a:rPr>
-              <a:t>    We demonstrate the approach in healthcare: clinic ↔ hospital.</a:t>
+              <a:defRPr sz="1200">
+                <a:solidFill>
+                  <a:srgbClr val="888899"/>
+                </a:solidFill>
+              </a:defRPr>
+            </a:pPr>
+            <a:r>
+              <a:t>AI BEAVERS Founder Hackathon  |  House of AI Hamburg  |  June 6, 2026</a:t>
             </a:r>
           </a:p>
         </p:txBody>
@@ -3344,12 +3323,12 @@
             <a:pPr algn="l">
               <a:defRPr sz="1000">
                 <a:solidFill>
-                  <a:srgbClr val="9999AA"/>
+                  <a:srgbClr val="888899"/>
                 </a:solidFill>
               </a:defRPr>
             </a:pPr>
             <a:r>
-              <a:t>DEMO — Research prototype only. Not medical advice, diagnosis, or treatment.</a:t>
+              <a:t>DEMO - Research prototype only. Not medical advice, diagnosis, or treatment.</a:t>
             </a:r>
           </a:p>
         </p:txBody>
@@ -3368,7 +3347,7 @@
     <p:bg>
       <p:bgPr>
         <a:solidFill>
-          <a:srgbClr val="1A1A2E"/>
+          <a:srgbClr val="1E1E2E"/>
         </a:solidFill>
         <a:effectLst/>
       </p:bgPr>
@@ -3389,7 +3368,7 @@
         <p:spPr>
           <a:xfrm>
             <a:off x="731520" y="548640"/>
-            <a:ext cx="10058400" cy="1097280"/>
+            <a:ext cx="10058400" cy="1280160"/>
           </a:xfrm>
           <a:prstGeom prst="rect">
             <a:avLst/>
@@ -3410,7 +3389,7 @@
               </a:defRPr>
             </a:pPr>
             <a:r>
-              <a:t>CrossMind — split inference across two models</a:t>
+              <a:t>How it works: two models, one connection</a:t>
             </a:r>
           </a:p>
         </p:txBody>
@@ -3424,7 +3403,7 @@
         <p:spPr>
           <a:xfrm>
             <a:off x="731520" y="2011680"/>
-            <a:ext cx="10058400" cy="3657600"/>
+            <a:ext cx="10058400" cy="3840480"/>
           </a:xfrm>
           <a:prstGeom prst="rect">
             <a:avLst/>
@@ -3448,7 +3427,7 @@
                   <a:srgbClr val="FFFFFF"/>
                 </a:solidFill>
               </a:rPr>
-              <a:t>•  Local model: Qwen 2.5 (clinic)</a:t>
+              <a:t>•  Clinic runs Qwen 2.5 locally</a:t>
             </a:r>
           </a:p>
           <a:p>
@@ -3463,7 +3442,7 @@
                   <a:srgbClr val="CCCCCC"/>
                 </a:solidFill>
               </a:rPr>
-              <a:t>    Encodes patient text locally. The prompt string never leaves the clinic.</a:t>
+              <a:t>    Encodes patient text into a numeric vector. The original words never leave the clinic.</a:t>
             </a:r>
           </a:p>
           <a:p>
@@ -3478,7 +3457,7 @@
                   <a:srgbClr val="FFFFFF"/>
                 </a:solidFill>
               </a:rPr>
-              <a:t>•  Remote model: Llama 3.1 (hospital)</a:t>
+              <a:t>•  Hospital runs Llama 3.1 remotely</a:t>
             </a:r>
           </a:p>
           <a:p>
@@ -3493,7 +3472,7 @@
                   <a:srgbClr val="CCCCCC"/>
                 </a:solidFill>
               </a:rPr>
-              <a:t>    Runs the specialist output layer on aligned vectors — not on your sentence.</a:t>
+              <a:t>    Receives only numbers (vectors), not your sentence, not your words, not your document.</a:t>
             </a:r>
           </a:p>
           <a:p>
@@ -3508,7 +3487,7 @@
                   <a:srgbClr val="FFFFFF"/>
                 </a:solidFill>
               </a:rPr>
-              <a:t>•  Linear alignment</a:t>
+              <a:t>•  Linear alignment connects them</a:t>
             </a:r>
           </a:p>
           <a:p>
@@ -3523,7 +3502,7 @@
                   <a:srgbClr val="CCCCCC"/>
                 </a:solidFill>
               </a:rPr>
-              <a:t>    A learned matrix W* maps Qwen’s hidden space into Llama’s basis (Gorbett &amp; Jana, 2025).</a:t>
+              <a:t>    A trained matrix translates Qwen's internal representation into Llama's space (Gorbett &amp; Jana, 2025).</a:t>
             </a:r>
           </a:p>
           <a:p>
@@ -3538,7 +3517,7 @@
                   <a:srgbClr val="FFFFFF"/>
                 </a:solidFill>
               </a:rPr>
-              <a:t>•  Trained on medical Q&amp;A</a:t>
+              <a:t>•  Trained on medical Q&amp;A pairs</a:t>
             </a:r>
           </a:p>
           <a:p>
@@ -3553,7 +3532,7 @@
                   <a:srgbClr val="CCCCCC"/>
                 </a:solidFill>
               </a:rPr>
-              <a:t>    Alignment trained on clinical question-answer pairs for domain accuracy.</a:t>
+              <a:t>    The alignment is optimized for clinical domain accuracy.</a:t>
             </a:r>
           </a:p>
         </p:txBody>
@@ -3566,8 +3545,8 @@
         </p:nvSpPr>
         <p:spPr>
           <a:xfrm>
-            <a:off x="731520" y="5303520"/>
-            <a:ext cx="10058400" cy="914400"/>
+            <a:off x="731520" y="5394960"/>
+            <a:ext cx="10515600" cy="914400"/>
           </a:xfrm>
           <a:prstGeom prst="rect">
             <a:avLst/>
@@ -3575,21 +3554,19 @@
           <a:noFill/>
         </p:spPr>
         <p:txBody>
-          <a:bodyPr wrap="none">
+          <a:bodyPr wrap="square">
             <a:spAutoFit/>
           </a:bodyPr>
           <a:lstStyle/>
           <a:p>
-            <a:pPr>
-              <a:defRPr sz="1300">
+            <a:r>
+              <a:rPr sz="1300">
                 <a:solidFill>
                   <a:srgbClr val="10B981"/>
                 </a:solidFill>
                 <a:latin typeface="Courier New"/>
-              </a:defRPr>
-            </a:pPr>
-            <a:r>
-              <a:t>Clinic (Qwen)  →  h_B  →  h_aligned = h_B × W* + b*  ── vectors ──▶  Hospital (Llama) → LM head → token</a:t>
+              </a:rPr>
+              <a:t>Clinic (Qwen) encodes text into vector  --&gt;  alignment matrix translates it  --&gt;  obfuscated via passphrase  --&gt;  Hospital (Llama) generates from vector  --&gt;  token back</a:t>
             </a:r>
           </a:p>
         </p:txBody>
@@ -3619,12 +3596,12 @@
             <a:pPr algn="l">
               <a:defRPr sz="1000">
                 <a:solidFill>
-                  <a:srgbClr val="9999AA"/>
+                  <a:srgbClr val="888899"/>
                 </a:solidFill>
               </a:defRPr>
             </a:pPr>
             <a:r>
-              <a:t>DEMO — Research prototype only. Not medical advice, diagnosis, or treatment.</a:t>
+              <a:t>DEMO - Research prototype only. Not medical advice, diagnosis, or treatment.</a:t>
             </a:r>
           </a:p>
         </p:txBody>
@@ -3643,7 +3620,7 @@
     <p:bg>
       <p:bgPr>
         <a:solidFill>
-          <a:srgbClr val="1A1A2E"/>
+          <a:srgbClr val="1E1E2E"/>
         </a:solidFill>
         <a:effectLst/>
       </p:bgPr>
@@ -3664,7 +3641,7 @@
         <p:spPr>
           <a:xfrm>
             <a:off x="731520" y="548640"/>
-            <a:ext cx="10058400" cy="1097280"/>
+            <a:ext cx="10058400" cy="1280160"/>
           </a:xfrm>
           <a:prstGeom prst="rect">
             <a:avLst/>
@@ -3685,7 +3662,7 @@
               </a:defRPr>
             </a:pPr>
             <a:r>
-              <a:t>Privacy Layer 1 — Sealed (wire obfuscation)</a:t>
+              <a:t>Privacy Layer 1: Sealed (wire obfuscation)</a:t>
             </a:r>
           </a:p>
         </p:txBody>
@@ -3699,7 +3676,7 @@
         <p:spPr>
           <a:xfrm>
             <a:off x="731520" y="2011680"/>
-            <a:ext cx="5303520" cy="3657600"/>
+            <a:ext cx="5303520" cy="3840480"/>
           </a:xfrm>
           <a:prstGeom prst="rect">
             <a:avLst/>
@@ -3738,7 +3715,7 @@
                   <a:srgbClr val="CCCCCC"/>
                 </a:solidFill>
               </a:rPr>
-              <a:t>    Each hidden state is sent individually — not the full document.</a:t>
+              <a:t>    Each hidden state travels individually. This adds a structural privacy layer: no full document crosses the wire.</a:t>
             </a:r>
           </a:p>
           <a:p>
@@ -3753,7 +3730,7 @@
                   <a:srgbClr val="FFFFFF"/>
                 </a:solidFill>
               </a:rPr>
-              <a:t>•  Obfuscation with shared passphrase (rotation R)</a:t>
+              <a:t>•  Shared passphrase rotates each vector</a:t>
             </a:r>
           </a:p>
           <a:p>
@@ -3768,7 +3745,7 @@
                   <a:srgbClr val="CCCCCC"/>
                 </a:solidFill>
               </a:rPr>
-              <a:t>    h_enc = h_aligned × R  —  Specialist only sees rotated vectors, never raw text.</a:t>
+              <a:t>    Before sending, the clinic rotates the vector using a shared secret. The specialist only ever sees rotated numbers.</a:t>
             </a:r>
           </a:p>
           <a:p>
@@ -3783,7 +3760,7 @@
                   <a:srgbClr val="FFFFFF"/>
                 </a:solidFill>
               </a:rPr>
-              <a:t>•  Wrong passphrase = garbled output</a:t>
+              <a:t>•  Wrong passphrase = garbled nonsense</a:t>
             </a:r>
           </a:p>
           <a:p>
@@ -3798,7 +3775,7 @@
                   <a:srgbClr val="CCCCCC"/>
                 </a:solidFill>
               </a:rPr>
-              <a:t>    Without the matching key, intercepted vectors are meaningless noise.</a:t>
+              <a:t>    Without the matching key, intercepted data is meaningless. See screenshot: mismatched keys produce noise.</a:t>
             </a:r>
           </a:p>
           <a:p>
@@ -3813,7 +3790,7 @@
                   <a:srgbClr val="FFFFFF"/>
                 </a:solidFill>
               </a:rPr>
-              <a:t>•  Protects against</a:t>
+              <a:t>•  Protects against passive eavesdroppers</a:t>
             </a:r>
           </a:p>
           <a:p>
@@ -3828,7 +3805,854 @@
                   <a:srgbClr val="CCCCCC"/>
                 </a:solidFill>
               </a:rPr>
-              <a:t>    Passive eavesdropper on the network link.</a:t>
+              <a:t>    Anyone tapping the network link gets rotated vectors they cannot reverse.</a:t>
+            </a:r>
+          </a:p>
+        </p:txBody>
+      </p:sp>
+      <p:pic>
+        <p:nvPicPr>
+          <p:cNvPr id="4" name="Picture 3" descr="3_sealed_incorrect_pass-65f9d005-2d82-4181-b521-64e19af025ea.png"/>
+          <p:cNvPicPr>
+            <a:picLocks noChangeAspect="1"/>
+          </p:cNvPicPr>
+          <p:nvPr/>
+        </p:nvPicPr>
+        <p:blipFill>
+          <a:blip r:embed="rId2"/>
+          <a:stretch>
+            <a:fillRect/>
+          </a:stretch>
+        </p:blipFill>
+        <p:spPr>
+          <a:xfrm>
+            <a:off x="6217920" y="2011680"/>
+            <a:ext cx="5486400" cy="3225403"/>
+          </a:xfrm>
+          <a:prstGeom prst="rect">
+            <a:avLst/>
+          </a:prstGeom>
+        </p:spPr>
+      </p:pic>
+      <p:sp>
+        <p:nvSpPr>
+          <p:cNvPr id="5" name="TextBox 4"/>
+          <p:cNvSpPr txBox="1"/>
+          <p:nvPr/>
+        </p:nvSpPr>
+        <p:spPr>
+          <a:xfrm>
+            <a:off x="6217920" y="5394960"/>
+            <a:ext cx="5486400" cy="640080"/>
+          </a:xfrm>
+          <a:prstGeom prst="rect">
+            <a:avLst/>
+          </a:prstGeom>
+          <a:noFill/>
+        </p:spPr>
+        <p:txBody>
+          <a:bodyPr wrap="square">
+            <a:spAutoFit/>
+          </a:bodyPr>
+          <a:lstStyle/>
+          <a:p>
+            <a:pPr algn="ctr"/>
+            <a:r>
+              <a:rPr sz="1100">
+                <a:solidFill>
+                  <a:srgbClr val="EF4444"/>
+                </a:solidFill>
+              </a:rPr>
+              <a:t>Mismatched passphrase: clinic and hospital have different keys.</a:t>
+            </a:r>
+          </a:p>
+          <a:p>
+            <a:pPr algn="ctr"/>
+            <a:r>
+              <a:rPr sz="1100">
+                <a:solidFill>
+                  <a:srgbClr val="CCCCCC"/>
+                </a:solidFill>
+              </a:rPr>
+              <a:t>Output is garbled. Data stays protected on the wire.</a:t>
+            </a:r>
+          </a:p>
+        </p:txBody>
+      </p:sp>
+      <p:sp>
+        <p:nvSpPr>
+          <p:cNvPr id="6" name="TextBox 5"/>
+          <p:cNvSpPr txBox="1"/>
+          <p:nvPr/>
+        </p:nvSpPr>
+        <p:spPr>
+          <a:xfrm>
+            <a:off x="457200" y="6400800"/>
+            <a:ext cx="10972800" cy="365760"/>
+          </a:xfrm>
+          <a:prstGeom prst="rect">
+            <a:avLst/>
+          </a:prstGeom>
+          <a:noFill/>
+        </p:spPr>
+        <p:txBody>
+          <a:bodyPr wrap="none">
+            <a:spAutoFit/>
+          </a:bodyPr>
+          <a:lstStyle/>
+          <a:p>
+            <a:pPr algn="l">
+              <a:defRPr sz="1000">
+                <a:solidFill>
+                  <a:srgbClr val="888899"/>
+                </a:solidFill>
+              </a:defRPr>
+            </a:pPr>
+            <a:r>
+              <a:t>DEMO - Research prototype only. Not medical advice, diagnosis, or treatment.</a:t>
+            </a:r>
+          </a:p>
+        </p:txBody>
+      </p:sp>
+    </p:spTree>
+  </p:cSld>
+  <p:clrMapOvr>
+    <a:masterClrMapping/>
+  </p:clrMapOvr>
+</p:sld>
+</file>
+
+<file path=ppt/slides/slide4.xml><?xml version="1.0" encoding="utf-8"?>
+<p:sld xmlns:a="http://schemas.openxmlformats.org/drawingml/2006/main" xmlns:p="http://schemas.openxmlformats.org/presentationml/2006/main" xmlns:r="http://schemas.openxmlformats.org/officeDocument/2006/relationships">
+  <p:cSld>
+    <p:bg>
+      <p:bgPr>
+        <a:solidFill>
+          <a:srgbClr val="1E1E2E"/>
+        </a:solidFill>
+        <a:effectLst/>
+      </p:bgPr>
+    </p:bg>
+    <p:spTree>
+      <p:nvGrpSpPr>
+        <p:cNvPr id="1" name=""/>
+        <p:cNvGrpSpPr/>
+        <p:nvPr/>
+      </p:nvGrpSpPr>
+      <p:grpSpPr/>
+      <p:sp>
+        <p:nvSpPr>
+          <p:cNvPr id="2" name="TextBox 1"/>
+          <p:cNvSpPr txBox="1"/>
+          <p:nvPr/>
+        </p:nvSpPr>
+        <p:spPr>
+          <a:xfrm>
+            <a:off x="731520" y="548640"/>
+            <a:ext cx="10058400" cy="1280160"/>
+          </a:xfrm>
+          <a:prstGeom prst="rect">
+            <a:avLst/>
+          </a:prstGeom>
+          <a:noFill/>
+        </p:spPr>
+        <p:txBody>
+          <a:bodyPr wrap="square">
+            <a:spAutoFit/>
+          </a:bodyPr>
+          <a:lstStyle/>
+          <a:p>
+            <a:pPr>
+              <a:defRPr sz="3600" b="1">
+                <a:solidFill>
+                  <a:srgbClr val="FFFFFF"/>
+                </a:solidFill>
+              </a:defRPr>
+            </a:pPr>
+            <a:r>
+              <a:t>Privacy Layer 2: HELIX (homomorphic encryption)</a:t>
+            </a:r>
+          </a:p>
+        </p:txBody>
+      </p:sp>
+      <p:sp>
+        <p:nvSpPr>
+          <p:cNvPr id="3" name="TextBox 2"/>
+          <p:cNvSpPr txBox="1"/>
+          <p:nvPr/>
+        </p:nvSpPr>
+        <p:spPr>
+          <a:xfrm>
+            <a:off x="731520" y="2011680"/>
+            <a:ext cx="5303520" cy="3840480"/>
+          </a:xfrm>
+          <a:prstGeom prst="rect">
+            <a:avLst/>
+          </a:prstGeom>
+          <a:noFill/>
+        </p:spPr>
+        <p:txBody>
+          <a:bodyPr wrap="square">
+            <a:spAutoFit/>
+          </a:bodyPr>
+          <a:lstStyle/>
+          <a:p>
+            <a:pPr>
+              <a:spcBef>
+                <a:spcPts val="1400"/>
+              </a:spcBef>
+            </a:pPr>
+            <a:r>
+              <a:rPr sz="2000" b="1">
+                <a:solidFill>
+                  <a:srgbClr val="FFFFFF"/>
+                </a:solidFill>
+              </a:rPr>
+              <a:t>•  CKKS homomorphic encryption</a:t>
+            </a:r>
+          </a:p>
+          <a:p>
+            <a:pPr>
+              <a:spcBef>
+                <a:spcPts val="400"/>
+              </a:spcBef>
+            </a:pPr>
+            <a:r>
+              <a:rPr sz="1600">
+                <a:solidFill>
+                  <a:srgbClr val="CCCCCC"/>
+                </a:solidFill>
+              </a:rPr>
+              <a:t>    The hospital computes on ciphertext. It never sees the plaintext vector at any point.</a:t>
+            </a:r>
+          </a:p>
+          <a:p>
+            <a:pPr>
+              <a:spcBef>
+                <a:spcPts val="1400"/>
+              </a:spcBef>
+            </a:pPr>
+            <a:r>
+              <a:rPr sz="2000" b="1">
+                <a:solidFill>
+                  <a:srgbClr val="FFFFFF"/>
+                </a:solidFill>
+              </a:rPr>
+              <a:t>•  Department routing (5 classes)</a:t>
+            </a:r>
+          </a:p>
+          <a:p>
+            <a:pPr>
+              <a:spcBef>
+                <a:spcPts val="400"/>
+              </a:spcBef>
+            </a:pPr>
+            <a:r>
+              <a:rPr sz="1600">
+                <a:solidFill>
+                  <a:srgbClr val="CCCCCC"/>
+                </a:solidFill>
+              </a:rPr>
+              <a:t>    Cardiology, Neurology, Oncology, Orthopedics, General Medicine.</a:t>
+            </a:r>
+          </a:p>
+          <a:p>
+            <a:pPr>
+              <a:spcBef>
+                <a:spcPts val="1400"/>
+              </a:spcBef>
+            </a:pPr>
+            <a:r>
+              <a:rPr sz="2000" b="1">
+                <a:solidFill>
+                  <a:srgbClr val="FFFFFF"/>
+                </a:solidFill>
+              </a:rPr>
+              <a:t>•  Hospital never sees the department label</a:t>
+            </a:r>
+          </a:p>
+          <a:p>
+            <a:pPr>
+              <a:spcBef>
+                <a:spcPts val="400"/>
+              </a:spcBef>
+            </a:pPr>
+            <a:r>
+              <a:rPr sz="1600">
+                <a:solidFill>
+                  <a:srgbClr val="CCCCCC"/>
+                </a:solidFill>
+              </a:rPr>
+              <a:t>    Only the clinic can decrypt the routing result. The hospital is truly blind.</a:t>
+            </a:r>
+          </a:p>
+          <a:p>
+            <a:pPr>
+              <a:spcBef>
+                <a:spcPts val="1400"/>
+              </a:spcBef>
+            </a:pPr>
+            <a:r>
+              <a:rPr sz="2000" b="1">
+                <a:solidFill>
+                  <a:srgbClr val="FFFFFF"/>
+                </a:solidFill>
+              </a:rPr>
+              <a:t>•  ~3.4 seconds per routing request</a:t>
+            </a:r>
+          </a:p>
+          <a:p>
+            <a:pPr>
+              <a:spcBef>
+                <a:spcPts val="400"/>
+              </a:spcBef>
+            </a:pPr>
+            <a:r>
+              <a:rPr sz="1600">
+                <a:solidFill>
+                  <a:srgbClr val="CCCCCC"/>
+                </a:solidFill>
+              </a:rPr>
+              <a:t>    Homomorphic operations are computationally expensive. Full-vocab generation (128k tokens) is not feasible yet. But a 5-class routing head is practical today.</a:t>
+            </a:r>
+          </a:p>
+        </p:txBody>
+      </p:sp>
+      <p:pic>
+        <p:nvPicPr>
+          <p:cNvPr id="4" name="Picture 3" descr="4_helix_routing_encrypt-c0c5322f-4c4c-451d-8ef5-06407fdf1fa8.png"/>
+          <p:cNvPicPr>
+            <a:picLocks noChangeAspect="1"/>
+          </p:cNvPicPr>
+          <p:nvPr/>
+        </p:nvPicPr>
+        <p:blipFill>
+          <a:blip r:embed="rId2"/>
+          <a:stretch>
+            <a:fillRect/>
+          </a:stretch>
+        </p:blipFill>
+        <p:spPr>
+          <a:xfrm>
+            <a:off x="6217920" y="2011680"/>
+            <a:ext cx="5486400" cy="3273623"/>
+          </a:xfrm>
+          <a:prstGeom prst="rect">
+            <a:avLst/>
+          </a:prstGeom>
+        </p:spPr>
+      </p:pic>
+      <p:sp>
+        <p:nvSpPr>
+          <p:cNvPr id="5" name="TextBox 4"/>
+          <p:cNvSpPr txBox="1"/>
+          <p:nvPr/>
+        </p:nvSpPr>
+        <p:spPr>
+          <a:xfrm>
+            <a:off x="6217920" y="5394960"/>
+            <a:ext cx="5486400" cy="457200"/>
+          </a:xfrm>
+          <a:prstGeom prst="rect">
+            <a:avLst/>
+          </a:prstGeom>
+          <a:noFill/>
+        </p:spPr>
+        <p:txBody>
+          <a:bodyPr wrap="none">
+            <a:spAutoFit/>
+          </a:bodyPr>
+          <a:lstStyle/>
+          <a:p>
+            <a:pPr algn="ctr"/>
+            <a:r>
+              <a:rPr sz="1100">
+                <a:solidFill>
+                  <a:srgbClr val="10B981"/>
+                </a:solidFill>
+              </a:rPr>
+              <a:t>HELIX routing: crypto verified, department decrypted only by clinic.</a:t>
+            </a:r>
+          </a:p>
+        </p:txBody>
+      </p:sp>
+      <p:sp>
+        <p:nvSpPr>
+          <p:cNvPr id="6" name="TextBox 5"/>
+          <p:cNvSpPr txBox="1"/>
+          <p:nvPr/>
+        </p:nvSpPr>
+        <p:spPr>
+          <a:xfrm>
+            <a:off x="457200" y="6400800"/>
+            <a:ext cx="10972800" cy="365760"/>
+          </a:xfrm>
+          <a:prstGeom prst="rect">
+            <a:avLst/>
+          </a:prstGeom>
+          <a:noFill/>
+        </p:spPr>
+        <p:txBody>
+          <a:bodyPr wrap="none">
+            <a:spAutoFit/>
+          </a:bodyPr>
+          <a:lstStyle/>
+          <a:p>
+            <a:pPr algn="l">
+              <a:defRPr sz="1000">
+                <a:solidFill>
+                  <a:srgbClr val="888899"/>
+                </a:solidFill>
+              </a:defRPr>
+            </a:pPr>
+            <a:r>
+              <a:t>DEMO - Research prototype only. Not medical advice, diagnosis, or treatment.</a:t>
+            </a:r>
+          </a:p>
+        </p:txBody>
+      </p:sp>
+    </p:spTree>
+  </p:cSld>
+  <p:clrMapOvr>
+    <a:masterClrMapping/>
+  </p:clrMapOvr>
+</p:sld>
+</file>
+
+<file path=ppt/slides/slide5.xml><?xml version="1.0" encoding="utf-8"?>
+<p:sld xmlns:a="http://schemas.openxmlformats.org/drawingml/2006/main" xmlns:p="http://schemas.openxmlformats.org/presentationml/2006/main" xmlns:r="http://schemas.openxmlformats.org/officeDocument/2006/relationships">
+  <p:cSld>
+    <p:bg>
+      <p:bgPr>
+        <a:solidFill>
+          <a:srgbClr val="1E1E2E"/>
+        </a:solidFill>
+        <a:effectLst/>
+      </p:bgPr>
+    </p:bg>
+    <p:spTree>
+      <p:nvGrpSpPr>
+        <p:cNvPr id="1" name=""/>
+        <p:cNvGrpSpPr/>
+        <p:nvPr/>
+      </p:nvGrpSpPr>
+      <p:grpSpPr/>
+      <p:sp>
+        <p:nvSpPr>
+          <p:cNvPr id="2" name="TextBox 1"/>
+          <p:cNvSpPr txBox="1"/>
+          <p:nvPr/>
+        </p:nvSpPr>
+        <p:spPr>
+          <a:xfrm>
+            <a:off x="731520" y="548640"/>
+            <a:ext cx="10058400" cy="1280160"/>
+          </a:xfrm>
+          <a:prstGeom prst="rect">
+            <a:avLst/>
+          </a:prstGeom>
+          <a:noFill/>
+        </p:spPr>
+        <p:txBody>
+          <a:bodyPr wrap="square">
+            <a:spAutoFit/>
+          </a:bodyPr>
+          <a:lstStyle/>
+          <a:p>
+            <a:pPr>
+              <a:defRPr sz="3600" b="1">
+                <a:solidFill>
+                  <a:srgbClr val="FFFFFF"/>
+                </a:solidFill>
+              </a:defRPr>
+            </a:pPr>
+            <a:r>
+              <a:t>What our privacy layers do and what they don't</a:t>
+            </a:r>
+          </a:p>
+        </p:txBody>
+      </p:sp>
+      <p:sp>
+        <p:nvSpPr>
+          <p:cNvPr id="3" name="TextBox 2"/>
+          <p:cNvSpPr txBox="1"/>
+          <p:nvPr/>
+        </p:nvSpPr>
+        <p:spPr>
+          <a:xfrm>
+            <a:off x="731520" y="2011680"/>
+            <a:ext cx="5029200" cy="4114800"/>
+          </a:xfrm>
+          <a:prstGeom prst="rect">
+            <a:avLst/>
+          </a:prstGeom>
+          <a:noFill/>
+        </p:spPr>
+        <p:txBody>
+          <a:bodyPr wrap="square">
+            <a:spAutoFit/>
+          </a:bodyPr>
+          <a:lstStyle/>
+          <a:p>
+            <a:r>
+              <a:rPr sz="2200" b="1">
+                <a:solidFill>
+                  <a:srgbClr val="10B981"/>
+                </a:solidFill>
+              </a:rPr>
+              <a:t>What it DOES</a:t>
+            </a:r>
+          </a:p>
+          <a:p>
+            <a:pPr>
+              <a:spcBef>
+                <a:spcPts val="1200"/>
+              </a:spcBef>
+            </a:pPr>
+            <a:r>
+              <a:rPr sz="1600">
+                <a:solidFill>
+                  <a:srgbClr val="FFFFFF"/>
+                </a:solidFill>
+              </a:rPr>
+              <a:t>•  Prompt text stays on the local machine</a:t>
+            </a:r>
+          </a:p>
+          <a:p>
+            <a:pPr>
+              <a:spcBef>
+                <a:spcPts val="1200"/>
+              </a:spcBef>
+            </a:pPr>
+            <a:r>
+              <a:rPr sz="1600">
+                <a:solidFill>
+                  <a:srgbClr val="FFFFFF"/>
+                </a:solidFill>
+              </a:rPr>
+              <a:t>•  Wire tap sees only rotated/encrypted vectors</a:t>
+            </a:r>
+          </a:p>
+          <a:p>
+            <a:pPr>
+              <a:spcBef>
+                <a:spcPts val="1200"/>
+              </a:spcBef>
+            </a:pPr>
+            <a:r>
+              <a:rPr sz="1600">
+                <a:solidFill>
+                  <a:srgbClr val="FFFFFF"/>
+                </a:solidFill>
+              </a:rPr>
+              <a:t>•  HELIX: hospital computes without seeing plaintext</a:t>
+            </a:r>
+          </a:p>
+          <a:p>
+            <a:pPr>
+              <a:spcBef>
+                <a:spcPts val="1200"/>
+              </a:spcBef>
+            </a:pPr>
+            <a:r>
+              <a:rPr sz="1600">
+                <a:solidFill>
+                  <a:srgbClr val="FFFFFF"/>
+                </a:solidFill>
+              </a:rPr>
+              <a:t>•  Department label decrypted only by clinic</a:t>
+            </a:r>
+          </a:p>
+          <a:p>
+            <a:pPr>
+              <a:spcBef>
+                <a:spcPts val="1200"/>
+              </a:spcBef>
+            </a:pPr>
+            <a:r>
+              <a:rPr sz="1600">
+                <a:solidFill>
+                  <a:srgbClr val="FFFFFF"/>
+                </a:solidFill>
+              </a:rPr>
+              <a:t>•  Data minimization: no full-text export needed</a:t>
+            </a:r>
+          </a:p>
+        </p:txBody>
+      </p:sp>
+      <p:sp>
+        <p:nvSpPr>
+          <p:cNvPr id="4" name="TextBox 3"/>
+          <p:cNvSpPr txBox="1"/>
+          <p:nvPr/>
+        </p:nvSpPr>
+        <p:spPr>
+          <a:xfrm>
+            <a:off x="6400800" y="2011680"/>
+            <a:ext cx="5303520" cy="4114800"/>
+          </a:xfrm>
+          <a:prstGeom prst="rect">
+            <a:avLst/>
+          </a:prstGeom>
+          <a:noFill/>
+        </p:spPr>
+        <p:txBody>
+          <a:bodyPr wrap="square">
+            <a:spAutoFit/>
+          </a:bodyPr>
+          <a:lstStyle/>
+          <a:p>
+            <a:r>
+              <a:rPr sz="2200" b="1">
+                <a:solidFill>
+                  <a:srgbClr val="F59E0B"/>
+                </a:solidFill>
+              </a:rPr>
+              <a:t>What it does NOT (yet)</a:t>
+            </a:r>
+          </a:p>
+          <a:p>
+            <a:pPr>
+              <a:spcBef>
+                <a:spcPts val="1200"/>
+              </a:spcBef>
+            </a:pPr>
+            <a:r>
+              <a:rPr sz="1600">
+                <a:solidFill>
+                  <a:srgbClr val="CCCCCC"/>
+                </a:solidFill>
+              </a:rPr>
+              <a:t>•  Full encrypted generation (too expensive to compute at vocab scale today)</a:t>
+            </a:r>
+          </a:p>
+          <a:p>
+            <a:pPr>
+              <a:spcBef>
+                <a:spcPts val="1200"/>
+              </a:spcBef>
+            </a:pPr>
+            <a:r>
+              <a:rPr sz="1600">
+                <a:solidFill>
+                  <a:srgbClr val="CCCCCC"/>
+                </a:solidFill>
+              </a:rPr>
+              <a:t>•  Sealed generation still requires hospital-side decrypt per token</a:t>
+            </a:r>
+          </a:p>
+          <a:p>
+            <a:pPr>
+              <a:spcBef>
+                <a:spcPts val="1200"/>
+              </a:spcBef>
+            </a:pPr>
+            <a:r>
+              <a:rPr sz="1600">
+                <a:solidFill>
+                  <a:srgbClr val="CCCCCC"/>
+                </a:solidFill>
+              </a:rPr>
+              <a:t>•  HIPAA/GDPR compliance certification</a:t>
+            </a:r>
+          </a:p>
+          <a:p>
+            <a:pPr>
+              <a:spcBef>
+                <a:spcPts val="1200"/>
+              </a:spcBef>
+            </a:pPr>
+            <a:r>
+              <a:rPr sz="1600">
+                <a:solidFill>
+                  <a:srgbClr val="CCCCCC"/>
+                </a:solidFill>
+              </a:rPr>
+              <a:t>•  Guarantee hospital learns nothing from vectors alone</a:t>
+            </a:r>
+          </a:p>
+          <a:p>
+            <a:pPr>
+              <a:spcBef>
+                <a:spcPts val="1200"/>
+              </a:spcBef>
+            </a:pPr>
+            <a:r>
+              <a:rPr sz="1600">
+                <a:solidFill>
+                  <a:srgbClr val="CCCCCC"/>
+                </a:solidFill>
+              </a:rPr>
+              <a:t>•  Clinical-grade diagnosis or medical advice</a:t>
+            </a:r>
+          </a:p>
+        </p:txBody>
+      </p:sp>
+      <p:sp>
+        <p:nvSpPr>
+          <p:cNvPr id="5" name="TextBox 4"/>
+          <p:cNvSpPr txBox="1"/>
+          <p:nvPr/>
+        </p:nvSpPr>
+        <p:spPr>
+          <a:xfrm>
+            <a:off x="457200" y="6400800"/>
+            <a:ext cx="10972800" cy="365760"/>
+          </a:xfrm>
+          <a:prstGeom prst="rect">
+            <a:avLst/>
+          </a:prstGeom>
+          <a:noFill/>
+        </p:spPr>
+        <p:txBody>
+          <a:bodyPr wrap="none">
+            <a:spAutoFit/>
+          </a:bodyPr>
+          <a:lstStyle/>
+          <a:p>
+            <a:pPr algn="l">
+              <a:defRPr sz="1000">
+                <a:solidFill>
+                  <a:srgbClr val="888899"/>
+                </a:solidFill>
+              </a:defRPr>
+            </a:pPr>
+            <a:r>
+              <a:t>DEMO - Research prototype only. Not medical advice, diagnosis, or treatment.</a:t>
+            </a:r>
+          </a:p>
+        </p:txBody>
+      </p:sp>
+    </p:spTree>
+  </p:cSld>
+  <p:clrMapOvr>
+    <a:masterClrMapping/>
+  </p:clrMapOvr>
+</p:sld>
+</file>
+
+<file path=ppt/slides/slide6.xml><?xml version="1.0" encoding="utf-8"?>
+<p:sld xmlns:a="http://schemas.openxmlformats.org/drawingml/2006/main" xmlns:p="http://schemas.openxmlformats.org/presentationml/2006/main" xmlns:r="http://schemas.openxmlformats.org/officeDocument/2006/relationships">
+  <p:cSld>
+    <p:bg>
+      <p:bgPr>
+        <a:solidFill>
+          <a:srgbClr val="1E1E2E"/>
+        </a:solidFill>
+        <a:effectLst/>
+      </p:bgPr>
+    </p:bg>
+    <p:spTree>
+      <p:nvGrpSpPr>
+        <p:cNvPr id="1" name=""/>
+        <p:cNvGrpSpPr/>
+        <p:nvPr/>
+      </p:nvGrpSpPr>
+      <p:grpSpPr/>
+      <p:sp>
+        <p:nvSpPr>
+          <p:cNvPr id="2" name="TextBox 1"/>
+          <p:cNvSpPr txBox="1"/>
+          <p:nvPr/>
+        </p:nvSpPr>
+        <p:spPr>
+          <a:xfrm>
+            <a:off x="731520" y="548640"/>
+            <a:ext cx="10058400" cy="1280160"/>
+          </a:xfrm>
+          <a:prstGeom prst="rect">
+            <a:avLst/>
+          </a:prstGeom>
+          <a:noFill/>
+        </p:spPr>
+        <p:txBody>
+          <a:bodyPr wrap="square">
+            <a:spAutoFit/>
+          </a:bodyPr>
+          <a:lstStyle/>
+          <a:p>
+            <a:pPr>
+              <a:defRPr sz="3000" b="1">
+                <a:solidFill>
+                  <a:srgbClr val="FFFFFF"/>
+                </a:solidFill>
+              </a:defRPr>
+            </a:pPr>
+            <a:r>
+              <a:t>Live demo: Clinic and Hospital connected</a:t>
+            </a:r>
+          </a:p>
+        </p:txBody>
+      </p:sp>
+      <p:sp>
+        <p:nvSpPr>
+          <p:cNvPr id="3" name="TextBox 2"/>
+          <p:cNvSpPr txBox="1"/>
+          <p:nvPr/>
+        </p:nvSpPr>
+        <p:spPr>
+          <a:xfrm>
+            <a:off x="731520" y="1463040"/>
+            <a:ext cx="10972800" cy="914400"/>
+          </a:xfrm>
+          <a:prstGeom prst="rect">
+            <a:avLst/>
+          </a:prstGeom>
+          <a:noFill/>
+        </p:spPr>
+        <p:txBody>
+          <a:bodyPr wrap="square">
+            <a:spAutoFit/>
+          </a:bodyPr>
+          <a:lstStyle/>
+          <a:p>
+            <a:r>
+              <a:rPr sz="1500">
+                <a:solidFill>
+                  <a:srgbClr val="FFFFFF"/>
+                </a:solidFill>
+              </a:rPr>
+              <a:t>Working end-to-end: </a:t>
+            </a:r>
+            <a:r>
+              <a:rPr sz="1500">
+                <a:solidFill>
+                  <a:srgbClr val="10B981"/>
+                </a:solidFill>
+              </a:rPr>
+              <a:t>Clinic encodes locally (alignment cosine ~0.83) </a:t>
+            </a:r>
+            <a:r>
+              <a:rPr sz="1500">
+                <a:solidFill>
+                  <a:srgbClr val="FFFFFF"/>
+                </a:solidFill>
+              </a:rPr>
+              <a:t>| </a:t>
+            </a:r>
+            <a:r>
+              <a:rPr sz="1500">
+                <a:solidFill>
+                  <a:srgbClr val="10B981"/>
+                </a:solidFill>
+              </a:rPr>
+              <a:t>Hospital routes via HELIX (~83% accuracy, ~3.4s) </a:t>
+            </a:r>
+            <a:r>
+              <a:rPr sz="1500">
+                <a:solidFill>
+                  <a:srgbClr val="FFFFFF"/>
+                </a:solidFill>
+              </a:rPr>
+              <a:t>| </a:t>
+            </a:r>
+            <a:r>
+              <a:rPr sz="1500">
+                <a:solidFill>
+                  <a:srgbClr val="10B981"/>
+                </a:solidFill>
+              </a:rPr>
+              <a:t>Sealed generation streams in real-time</a:t>
             </a:r>
           </a:p>
         </p:txBody>
@@ -3849,736 +4673,8 @@
         </p:blipFill>
         <p:spPr>
           <a:xfrm>
-            <a:off x="6217920" y="1828800"/>
-            <a:ext cx="5486400" cy="3273623"/>
-          </a:xfrm>
-          <a:prstGeom prst="rect">
-            <a:avLst/>
-          </a:prstGeom>
-        </p:spPr>
-      </p:pic>
-      <p:sp>
-        <p:nvSpPr>
-          <p:cNvPr id="5" name="TextBox 4"/>
-          <p:cNvSpPr txBox="1"/>
-          <p:nvPr/>
-        </p:nvSpPr>
-        <p:spPr>
-          <a:xfrm>
-            <a:off x="457200" y="6400800"/>
-            <a:ext cx="10972800" cy="365760"/>
-          </a:xfrm>
-          <a:prstGeom prst="rect">
-            <a:avLst/>
-          </a:prstGeom>
-          <a:noFill/>
-        </p:spPr>
-        <p:txBody>
-          <a:bodyPr wrap="none">
-            <a:spAutoFit/>
-          </a:bodyPr>
-          <a:lstStyle/>
-          <a:p>
-            <a:pPr algn="l">
-              <a:defRPr sz="1000">
-                <a:solidFill>
-                  <a:srgbClr val="9999AA"/>
-                </a:solidFill>
-              </a:defRPr>
-            </a:pPr>
-            <a:r>
-              <a:t>DEMO — Research prototype only. Not medical advice, diagnosis, or treatment.</a:t>
-            </a:r>
-          </a:p>
-        </p:txBody>
-      </p:sp>
-    </p:spTree>
-  </p:cSld>
-  <p:clrMapOvr>
-    <a:masterClrMapping/>
-  </p:clrMapOvr>
-</p:sld>
-</file>
-
-<file path=ppt/slides/slide4.xml><?xml version="1.0" encoding="utf-8"?>
-<p:sld xmlns:a="http://schemas.openxmlformats.org/drawingml/2006/main" xmlns:p="http://schemas.openxmlformats.org/presentationml/2006/main" xmlns:r="http://schemas.openxmlformats.org/officeDocument/2006/relationships">
-  <p:cSld>
-    <p:bg>
-      <p:bgPr>
-        <a:solidFill>
-          <a:srgbClr val="1A1A2E"/>
-        </a:solidFill>
-        <a:effectLst/>
-      </p:bgPr>
-    </p:bg>
-    <p:spTree>
-      <p:nvGrpSpPr>
-        <p:cNvPr id="1" name=""/>
-        <p:cNvGrpSpPr/>
-        <p:nvPr/>
-      </p:nvGrpSpPr>
-      <p:grpSpPr/>
-      <p:sp>
-        <p:nvSpPr>
-          <p:cNvPr id="2" name="TextBox 1"/>
-          <p:cNvSpPr txBox="1"/>
-          <p:nvPr/>
-        </p:nvSpPr>
-        <p:spPr>
-          <a:xfrm>
-            <a:off x="731520" y="548640"/>
-            <a:ext cx="10058400" cy="1097280"/>
-          </a:xfrm>
-          <a:prstGeom prst="rect">
-            <a:avLst/>
-          </a:prstGeom>
-          <a:noFill/>
-        </p:spPr>
-        <p:txBody>
-          <a:bodyPr wrap="square">
-            <a:spAutoFit/>
-          </a:bodyPr>
-          <a:lstStyle/>
-          <a:p>
-            <a:pPr>
-              <a:defRPr sz="3600" b="1">
-                <a:solidFill>
-                  <a:srgbClr val="FFFFFF"/>
-                </a:solidFill>
-              </a:defRPr>
-            </a:pPr>
-            <a:r>
-              <a:t>Privacy Layer 2 — HELIX (homomorphic encryption)</a:t>
-            </a:r>
-          </a:p>
-        </p:txBody>
-      </p:sp>
-      <p:sp>
-        <p:nvSpPr>
-          <p:cNvPr id="3" name="TextBox 2"/>
-          <p:cNvSpPr txBox="1"/>
-          <p:nvPr/>
-        </p:nvSpPr>
-        <p:spPr>
-          <a:xfrm>
-            <a:off x="731520" y="2011680"/>
-            <a:ext cx="5303520" cy="3657600"/>
-          </a:xfrm>
-          <a:prstGeom prst="rect">
-            <a:avLst/>
-          </a:prstGeom>
-          <a:noFill/>
-        </p:spPr>
-        <p:txBody>
-          <a:bodyPr wrap="square">
-            <a:spAutoFit/>
-          </a:bodyPr>
-          <a:lstStyle/>
-          <a:p>
-            <a:pPr>
-              <a:spcBef>
-                <a:spcPts val="1400"/>
-              </a:spcBef>
-            </a:pPr>
-            <a:r>
-              <a:rPr sz="2000" b="1">
-                <a:solidFill>
-                  <a:srgbClr val="FFFFFF"/>
-                </a:solidFill>
-              </a:rPr>
-              <a:t>•  CKKS homomorphic encryption</a:t>
-            </a:r>
-          </a:p>
-          <a:p>
-            <a:pPr>
-              <a:spcBef>
-                <a:spcPts val="400"/>
-              </a:spcBef>
-            </a:pPr>
-            <a:r>
-              <a:rPr sz="1600">
-                <a:solidFill>
-                  <a:srgbClr val="CCCCCC"/>
-                </a:solidFill>
-              </a:rPr>
-              <a:t>    The hospital computes on ciphertext — never sees the plaintext vector.</a:t>
-            </a:r>
-          </a:p>
-          <a:p>
-            <a:pPr>
-              <a:spcBef>
-                <a:spcPts val="1400"/>
-              </a:spcBef>
-            </a:pPr>
-            <a:r>
-              <a:rPr sz="2000" b="1">
-                <a:solidFill>
-                  <a:srgbClr val="FFFFFF"/>
-                </a:solidFill>
-              </a:rPr>
-              <a:t>•  Department routing (5 classes)</a:t>
-            </a:r>
-          </a:p>
-          <a:p>
-            <a:pPr>
-              <a:spcBef>
-                <a:spcPts val="400"/>
-              </a:spcBef>
-            </a:pPr>
-            <a:r>
-              <a:rPr sz="1600">
-                <a:solidFill>
-                  <a:srgbClr val="CCCCCC"/>
-                </a:solidFill>
-              </a:rPr>
-              <a:t>    Cardiology, Neurology, Oncology, Orthopedics, General Medicine.</a:t>
-            </a:r>
-          </a:p>
-          <a:p>
-            <a:pPr>
-              <a:spcBef>
-                <a:spcPts val="1400"/>
-              </a:spcBef>
-            </a:pPr>
-            <a:r>
-              <a:rPr sz="2000" b="1">
-                <a:solidFill>
-                  <a:srgbClr val="FFFFFF"/>
-                </a:solidFill>
-              </a:rPr>
-              <a:t>•  Hospital never sees the department label</a:t>
-            </a:r>
-          </a:p>
-          <a:p>
-            <a:pPr>
-              <a:spcBef>
-                <a:spcPts val="400"/>
-              </a:spcBef>
-            </a:pPr>
-            <a:r>
-              <a:rPr sz="1600">
-                <a:solidFill>
-                  <a:srgbClr val="CCCCCC"/>
-                </a:solidFill>
-              </a:rPr>
-              <a:t>    Only the clinic can decrypt the routing result. Truly encrypted compute.</a:t>
-            </a:r>
-          </a:p>
-          <a:p>
-            <a:pPr>
-              <a:spcBef>
-                <a:spcPts val="1400"/>
-              </a:spcBef>
-            </a:pPr>
-            <a:r>
-              <a:rPr sz="2000" b="1">
-                <a:solidFill>
-                  <a:srgbClr val="FFFFFF"/>
-                </a:solidFill>
-              </a:rPr>
-              <a:t>•  ~3.4s per routing request</a:t>
-            </a:r>
-          </a:p>
-          <a:p>
-            <a:pPr>
-              <a:spcBef>
-                <a:spcPts val="400"/>
-              </a:spcBef>
-            </a:pPr>
-            <a:r>
-              <a:rPr sz="1600">
-                <a:solidFill>
-                  <a:srgbClr val="CCCCCC"/>
-                </a:solidFill>
-              </a:rPr>
-              <a:t>    Practical for classification heads. Not yet viable for full-vocab generation.</a:t>
-            </a:r>
-          </a:p>
-        </p:txBody>
-      </p:sp>
-      <p:pic>
-        <p:nvPicPr>
-          <p:cNvPr id="4" name="Picture 3" descr="4_helix_routing_encrypt-c0c5322f-4c4c-451d-8ef5-06407fdf1fa8.png"/>
-          <p:cNvPicPr>
-            <a:picLocks noChangeAspect="1"/>
-          </p:cNvPicPr>
-          <p:nvPr/>
-        </p:nvPicPr>
-        <p:blipFill>
-          <a:blip r:embed="rId2"/>
-          <a:stretch>
-            <a:fillRect/>
-          </a:stretch>
-        </p:blipFill>
-        <p:spPr>
-          <a:xfrm>
-            <a:off x="6217920" y="1828800"/>
-            <a:ext cx="5486400" cy="3273623"/>
-          </a:xfrm>
-          <a:prstGeom prst="rect">
-            <a:avLst/>
-          </a:prstGeom>
-        </p:spPr>
-      </p:pic>
-      <p:sp>
-        <p:nvSpPr>
-          <p:cNvPr id="5" name="TextBox 4"/>
-          <p:cNvSpPr txBox="1"/>
-          <p:nvPr/>
-        </p:nvSpPr>
-        <p:spPr>
-          <a:xfrm>
-            <a:off x="457200" y="6400800"/>
-            <a:ext cx="10972800" cy="365760"/>
-          </a:xfrm>
-          <a:prstGeom prst="rect">
-            <a:avLst/>
-          </a:prstGeom>
-          <a:noFill/>
-        </p:spPr>
-        <p:txBody>
-          <a:bodyPr wrap="none">
-            <a:spAutoFit/>
-          </a:bodyPr>
-          <a:lstStyle/>
-          <a:p>
-            <a:pPr algn="l">
-              <a:defRPr sz="1000">
-                <a:solidFill>
-                  <a:srgbClr val="9999AA"/>
-                </a:solidFill>
-              </a:defRPr>
-            </a:pPr>
-            <a:r>
-              <a:t>DEMO — Research prototype only. Not medical advice, diagnosis, or treatment.</a:t>
-            </a:r>
-          </a:p>
-        </p:txBody>
-      </p:sp>
-    </p:spTree>
-  </p:cSld>
-  <p:clrMapOvr>
-    <a:masterClrMapping/>
-  </p:clrMapOvr>
-</p:sld>
-</file>
-
-<file path=ppt/slides/slide5.xml><?xml version="1.0" encoding="utf-8"?>
-<p:sld xmlns:a="http://schemas.openxmlformats.org/drawingml/2006/main" xmlns:p="http://schemas.openxmlformats.org/presentationml/2006/main" xmlns:r="http://schemas.openxmlformats.org/officeDocument/2006/relationships">
-  <p:cSld>
-    <p:bg>
-      <p:bgPr>
-        <a:solidFill>
-          <a:srgbClr val="1A1A2E"/>
-        </a:solidFill>
-        <a:effectLst/>
-      </p:bgPr>
-    </p:bg>
-    <p:spTree>
-      <p:nvGrpSpPr>
-        <p:cNvPr id="1" name=""/>
-        <p:cNvGrpSpPr/>
-        <p:nvPr/>
-      </p:nvGrpSpPr>
-      <p:grpSpPr/>
-      <p:sp>
-        <p:nvSpPr>
-          <p:cNvPr id="2" name="TextBox 1"/>
-          <p:cNvSpPr txBox="1"/>
-          <p:nvPr/>
-        </p:nvSpPr>
-        <p:spPr>
-          <a:xfrm>
-            <a:off x="731520" y="548640"/>
-            <a:ext cx="10058400" cy="1097280"/>
-          </a:xfrm>
-          <a:prstGeom prst="rect">
-            <a:avLst/>
-          </a:prstGeom>
-          <a:noFill/>
-        </p:spPr>
-        <p:txBody>
-          <a:bodyPr wrap="square">
-            <a:spAutoFit/>
-          </a:bodyPr>
-          <a:lstStyle/>
-          <a:p>
-            <a:pPr>
-              <a:defRPr sz="3600" b="1">
-                <a:solidFill>
-                  <a:srgbClr val="FFFFFF"/>
-                </a:solidFill>
-              </a:defRPr>
-            </a:pPr>
-            <a:r>
-              <a:t>What our privacy layers do — and what they don’t</a:t>
-            </a:r>
-          </a:p>
-        </p:txBody>
-      </p:sp>
-      <p:sp>
-        <p:nvSpPr>
-          <p:cNvPr id="3" name="TextBox 2"/>
-          <p:cNvSpPr txBox="1"/>
-          <p:nvPr/>
-        </p:nvSpPr>
-        <p:spPr>
-          <a:xfrm>
-            <a:off x="731520" y="2011680"/>
-            <a:ext cx="5029200" cy="4114800"/>
-          </a:xfrm>
-          <a:prstGeom prst="rect">
-            <a:avLst/>
-          </a:prstGeom>
-          <a:noFill/>
-        </p:spPr>
-        <p:txBody>
-          <a:bodyPr wrap="square">
-            <a:spAutoFit/>
-          </a:bodyPr>
-          <a:lstStyle/>
-          <a:p>
-            <a:r>
-              <a:rPr sz="2200" b="1">
-                <a:solidFill>
-                  <a:srgbClr val="10B981"/>
-                </a:solidFill>
-              </a:rPr>
-              <a:t>✅  What it DOES</a:t>
-            </a:r>
-          </a:p>
-          <a:p>
-            <a:pPr>
-              <a:spcBef>
-                <a:spcPts val="1000"/>
-              </a:spcBef>
-            </a:pPr>
-            <a:r>
-              <a:rPr sz="1600">
-                <a:solidFill>
-                  <a:srgbClr val="FFFFFF"/>
-                </a:solidFill>
-              </a:rPr>
-              <a:t>•  Prompt text stays on the local machine</a:t>
-            </a:r>
-          </a:p>
-          <a:p>
-            <a:pPr>
-              <a:spcBef>
-                <a:spcPts val="1000"/>
-              </a:spcBef>
-            </a:pPr>
-            <a:r>
-              <a:rPr sz="1600">
-                <a:solidFill>
-                  <a:srgbClr val="FFFFFF"/>
-                </a:solidFill>
-              </a:rPr>
-              <a:t>•  Wire tap sees only rotated/encrypted vectors</a:t>
-            </a:r>
-          </a:p>
-          <a:p>
-            <a:pPr>
-              <a:spcBef>
-                <a:spcPts val="1000"/>
-              </a:spcBef>
-            </a:pPr>
-            <a:r>
-              <a:rPr sz="1600">
-                <a:solidFill>
-                  <a:srgbClr val="FFFFFF"/>
-                </a:solidFill>
-              </a:rPr>
-              <a:t>•  HELIX: hospital computes without seeing plaintext</a:t>
-            </a:r>
-          </a:p>
-          <a:p>
-            <a:pPr>
-              <a:spcBef>
-                <a:spcPts val="1000"/>
-              </a:spcBef>
-            </a:pPr>
-            <a:r>
-              <a:rPr sz="1600">
-                <a:solidFill>
-                  <a:srgbClr val="FFFFFF"/>
-                </a:solidFill>
-              </a:rPr>
-              <a:t>•  Department label decrypted only by clinic</a:t>
-            </a:r>
-          </a:p>
-          <a:p>
-            <a:pPr>
-              <a:spcBef>
-                <a:spcPts val="1000"/>
-              </a:spcBef>
-            </a:pPr>
-            <a:r>
-              <a:rPr sz="1600">
-                <a:solidFill>
-                  <a:srgbClr val="FFFFFF"/>
-                </a:solidFill>
-              </a:rPr>
-              <a:t>•  Data minimization — no full-text export</a:t>
-            </a:r>
-          </a:p>
-        </p:txBody>
-      </p:sp>
-      <p:sp>
-        <p:nvSpPr>
-          <p:cNvPr id="4" name="TextBox 3"/>
-          <p:cNvSpPr txBox="1"/>
-          <p:nvPr/>
-        </p:nvSpPr>
-        <p:spPr>
-          <a:xfrm>
-            <a:off x="6400800" y="2011680"/>
-            <a:ext cx="5029200" cy="4114800"/>
-          </a:xfrm>
-          <a:prstGeom prst="rect">
-            <a:avLst/>
-          </a:prstGeom>
-          <a:noFill/>
-        </p:spPr>
-        <p:txBody>
-          <a:bodyPr wrap="square">
-            <a:spAutoFit/>
-          </a:bodyPr>
-          <a:lstStyle/>
-          <a:p>
-            <a:r>
-              <a:rPr sz="2200" b="1">
-                <a:solidFill>
-                  <a:srgbClr val="F59E0B"/>
-                </a:solidFill>
-              </a:rPr>
-              <a:t>⚠️  What it does NOT (yet)</a:t>
-            </a:r>
-          </a:p>
-          <a:p>
-            <a:pPr>
-              <a:spcBef>
-                <a:spcPts val="1000"/>
-              </a:spcBef>
-            </a:pPr>
-            <a:r>
-              <a:rPr sz="1600">
-                <a:solidFill>
-                  <a:srgbClr val="CCCCCC"/>
-                </a:solidFill>
-              </a:rPr>
-              <a:t>•  Full encrypted generation (server decrypts for Sealed gen)</a:t>
-            </a:r>
-          </a:p>
-          <a:p>
-            <a:pPr>
-              <a:spcBef>
-                <a:spcPts val="1000"/>
-              </a:spcBef>
-            </a:pPr>
-            <a:r>
-              <a:rPr sz="1600">
-                <a:solidFill>
-                  <a:srgbClr val="CCCCCC"/>
-                </a:solidFill>
-              </a:rPr>
-              <a:t>•  HIPAA/GDPR compliance certification</a:t>
-            </a:r>
-          </a:p>
-          <a:p>
-            <a:pPr>
-              <a:spcBef>
-                <a:spcPts val="1000"/>
-              </a:spcBef>
-            </a:pPr>
-            <a:r>
-              <a:rPr sz="1600">
-                <a:solidFill>
-                  <a:srgbClr val="CCCCCC"/>
-                </a:solidFill>
-              </a:rPr>
-              <a:t>•  Guarantee hospital learns nothing from vectors</a:t>
-            </a:r>
-          </a:p>
-          <a:p>
-            <a:pPr>
-              <a:spcBef>
-                <a:spcPts val="1000"/>
-              </a:spcBef>
-            </a:pPr>
-            <a:r>
-              <a:rPr sz="1600">
-                <a:solidFill>
-                  <a:srgbClr val="CCCCCC"/>
-                </a:solidFill>
-              </a:rPr>
-              <a:t>•  Clinical-grade diagnosis or medical advice</a:t>
-            </a:r>
-          </a:p>
-          <a:p>
-            <a:pPr>
-              <a:spcBef>
-                <a:spcPts val="1000"/>
-              </a:spcBef>
-            </a:pPr>
-            <a:r>
-              <a:rPr sz="1600">
-                <a:solidFill>
-                  <a:srgbClr val="CCCCCC"/>
-                </a:solidFill>
-              </a:rPr>
-              <a:t>•  Protection from a curious hub (for generation)</a:t>
-            </a:r>
-          </a:p>
-        </p:txBody>
-      </p:sp>
-      <p:sp>
-        <p:nvSpPr>
-          <p:cNvPr id="5" name="TextBox 4"/>
-          <p:cNvSpPr txBox="1"/>
-          <p:nvPr/>
-        </p:nvSpPr>
-        <p:spPr>
-          <a:xfrm>
-            <a:off x="457200" y="6400800"/>
-            <a:ext cx="10972800" cy="365760"/>
-          </a:xfrm>
-          <a:prstGeom prst="rect">
-            <a:avLst/>
-          </a:prstGeom>
-          <a:noFill/>
-        </p:spPr>
-        <p:txBody>
-          <a:bodyPr wrap="none">
-            <a:spAutoFit/>
-          </a:bodyPr>
-          <a:lstStyle/>
-          <a:p>
-            <a:pPr algn="l">
-              <a:defRPr sz="1000">
-                <a:solidFill>
-                  <a:srgbClr val="9999AA"/>
-                </a:solidFill>
-              </a:defRPr>
-            </a:pPr>
-            <a:r>
-              <a:t>DEMO — Research prototype only. Not medical advice, diagnosis, or treatment.</a:t>
-            </a:r>
-          </a:p>
-        </p:txBody>
-      </p:sp>
-    </p:spTree>
-  </p:cSld>
-  <p:clrMapOvr>
-    <a:masterClrMapping/>
-  </p:clrMapOvr>
-</p:sld>
-</file>
-
-<file path=ppt/slides/slide6.xml><?xml version="1.0" encoding="utf-8"?>
-<p:sld xmlns:a="http://schemas.openxmlformats.org/drawingml/2006/main" xmlns:p="http://schemas.openxmlformats.org/presentationml/2006/main" xmlns:r="http://schemas.openxmlformats.org/officeDocument/2006/relationships">
-  <p:cSld>
-    <p:bg>
-      <p:bgPr>
-        <a:solidFill>
-          <a:srgbClr val="1A1A2E"/>
-        </a:solidFill>
-        <a:effectLst/>
-      </p:bgPr>
-    </p:bg>
-    <p:spTree>
-      <p:nvGrpSpPr>
-        <p:cNvPr id="1" name=""/>
-        <p:cNvGrpSpPr/>
-        <p:nvPr/>
-      </p:nvGrpSpPr>
-      <p:grpSpPr/>
-      <p:sp>
-        <p:nvSpPr>
-          <p:cNvPr id="2" name="TextBox 1"/>
-          <p:cNvSpPr txBox="1"/>
-          <p:nvPr/>
-        </p:nvSpPr>
-        <p:spPr>
-          <a:xfrm>
-            <a:off x="731520" y="548640"/>
-            <a:ext cx="10058400" cy="1097280"/>
-          </a:xfrm>
-          <a:prstGeom prst="rect">
-            <a:avLst/>
-          </a:prstGeom>
-          <a:noFill/>
-        </p:spPr>
-        <p:txBody>
-          <a:bodyPr wrap="square">
-            <a:spAutoFit/>
-          </a:bodyPr>
-          <a:lstStyle/>
-          <a:p>
-            <a:pPr>
-              <a:defRPr sz="3000" b="1">
-                <a:solidFill>
-                  <a:srgbClr val="FFFFFF"/>
-                </a:solidFill>
-              </a:defRPr>
-            </a:pPr>
-            <a:r>
-              <a:t>Live demo — Clinic ↔ Hospital in action</a:t>
-            </a:r>
-          </a:p>
-        </p:txBody>
-      </p:sp>
-      <p:sp>
-        <p:nvSpPr>
-          <p:cNvPr id="3" name="TextBox 2"/>
-          <p:cNvSpPr txBox="1"/>
-          <p:nvPr/>
-        </p:nvSpPr>
-        <p:spPr>
-          <a:xfrm>
-            <a:off x="731520" y="1463040"/>
-            <a:ext cx="10972800" cy="731520"/>
-          </a:xfrm>
-          <a:prstGeom prst="rect">
-            <a:avLst/>
-          </a:prstGeom>
-          <a:noFill/>
-        </p:spPr>
-        <p:txBody>
-          <a:bodyPr wrap="none">
-            <a:spAutoFit/>
-          </a:bodyPr>
-          <a:lstStyle/>
-          <a:p>
-            <a:r>
-              <a:rPr sz="1400">
-                <a:solidFill>
-                  <a:srgbClr val="10B981"/>
-                </a:solidFill>
-              </a:rPr>
-              <a:t>Alignment cosine: ~0.83   |   Routing accuracy: ~83% val   |   HELIX compute: ~3.4s   |   Sealed: real-time streaming</a:t>
-            </a:r>
-          </a:p>
-        </p:txBody>
-      </p:sp>
-      <p:pic>
-        <p:nvPicPr>
-          <p:cNvPr id="4" name="Picture 3" descr="1_initial_state-7c9e8b79-2041-4e92-b799-2a1511f5b9b4.png"/>
-          <p:cNvPicPr>
-            <a:picLocks noChangeAspect="1"/>
-          </p:cNvPicPr>
-          <p:nvPr/>
-        </p:nvPicPr>
-        <p:blipFill>
-          <a:blip r:embed="rId2"/>
-          <a:stretch>
-            <a:fillRect/>
-          </a:stretch>
-        </p:blipFill>
-        <p:spPr>
-          <a:xfrm>
-            <a:off x="274320" y="2286000"/>
-            <a:ext cx="5760720" cy="3442930"/>
+            <a:off x="274320" y="2560320"/>
+            <a:ext cx="5760720" cy="3437305"/>
           </a:xfrm>
           <a:prstGeom prst="rect">
             <a:avLst/>
@@ -4601,7 +4697,7 @@
         </p:blipFill>
         <p:spPr>
           <a:xfrm>
-            <a:off x="6217920" y="2286000"/>
+            <a:off x="6217920" y="2560320"/>
             <a:ext cx="5760720" cy="3437305"/>
           </a:xfrm>
           <a:prstGeom prst="rect">
@@ -4617,8 +4713,8 @@
         </p:nvSpPr>
         <p:spPr>
           <a:xfrm>
-            <a:off x="274320" y="5669280"/>
-            <a:ext cx="5486400" cy="457200"/>
+            <a:off x="274320" y="5852160"/>
+            <a:ext cx="5760720" cy="457200"/>
           </a:xfrm>
           <a:prstGeom prst="rect">
             <a:avLst/>
@@ -4631,15 +4727,14 @@
           </a:bodyPr>
           <a:lstStyle/>
           <a:p>
-            <a:pPr algn="ctr">
-              <a:defRPr sz="1100">
+            <a:pPr algn="ctr"/>
+            <a:r>
+              <a:rPr sz="1100">
                 <a:solidFill>
                   <a:srgbClr val="CCCCCC"/>
                 </a:solidFill>
-              </a:defRPr>
-            </a:pPr>
-            <a:r>
-              <a:t>↑ Sealed mode: clinic encodes, hospital decodes from vectors</a:t>
+              </a:rPr>
+              <a:t>Sealed mode: vectors streaming, passphrase matched</a:t>
             </a:r>
           </a:p>
         </p:txBody>
@@ -4652,8 +4747,8 @@
         </p:nvSpPr>
         <p:spPr>
           <a:xfrm>
-            <a:off x="6217920" y="5669280"/>
-            <a:ext cx="5486400" cy="457200"/>
+            <a:off x="6217920" y="5852160"/>
+            <a:ext cx="5760720" cy="457200"/>
           </a:xfrm>
           <a:prstGeom prst="rect">
             <a:avLst/>
@@ -4666,15 +4761,14 @@
           </a:bodyPr>
           <a:lstStyle/>
           <a:p>
-            <a:pPr algn="ctr">
-              <a:defRPr sz="1100">
+            <a:pPr algn="ctr"/>
+            <a:r>
+              <a:rPr sz="1100">
                 <a:solidFill>
                   <a:srgbClr val="CCCCCC"/>
                 </a:solidFill>
-              </a:defRPr>
-            </a:pPr>
-            <a:r>
-              <a:t>↑ HELIX mode: encrypted routing, clinic decrypts department</a:t>
+              </a:rPr>
+              <a:t>HELIX mode: encrypted routing, department decrypted by clinic only</a:t>
             </a:r>
           </a:p>
         </p:txBody>
@@ -4704,12 +4798,12 @@
             <a:pPr algn="l">
               <a:defRPr sz="1000">
                 <a:solidFill>
-                  <a:srgbClr val="9999AA"/>
+                  <a:srgbClr val="888899"/>
                 </a:solidFill>
               </a:defRPr>
             </a:pPr>
             <a:r>
-              <a:t>DEMO — Research prototype only. Not medical advice, diagnosis, or treatment.</a:t>
+              <a:t>DEMO - Research prototype only. Not medical advice, diagnosis, or treatment.</a:t>
             </a:r>
           </a:p>
         </p:txBody>
@@ -4728,7 +4822,7 @@
     <p:bg>
       <p:bgPr>
         <a:solidFill>
-          <a:srgbClr val="1A1A2E"/>
+          <a:srgbClr val="1E1E2E"/>
         </a:solidFill>
         <a:effectLst/>
       </p:bgPr>
@@ -4749,7 +4843,7 @@
         <p:spPr>
           <a:xfrm>
             <a:off x="731520" y="548640"/>
-            <a:ext cx="10058400" cy="1097280"/>
+            <a:ext cx="10058400" cy="1280160"/>
           </a:xfrm>
           <a:prstGeom prst="rect">
             <a:avLst/>
@@ -4770,7 +4864,7 @@
               </a:defRPr>
             </a:pPr>
             <a:r>
-              <a:t>Phase 2 — Beyond text queries</a:t>
+              <a:t>What is to come</a:t>
             </a:r>
           </a:p>
         </p:txBody>
@@ -4784,7 +4878,7 @@
         <p:spPr>
           <a:xfrm>
             <a:off x="731520" y="2011680"/>
-            <a:ext cx="10058400" cy="3657600"/>
+            <a:ext cx="10058400" cy="3840480"/>
           </a:xfrm>
           <a:prstGeom prst="rect">
             <a:avLst/>
@@ -4838,7 +4932,7 @@
                   <a:srgbClr val="FFFFFF"/>
                 </a:solidFill>
               </a:rPr>
-              <a:t>•  Upload images &amp; reports</a:t>
+              <a:t>•  Upload images and reports</a:t>
             </a:r>
           </a:p>
           <a:p>
@@ -4853,7 +4947,7 @@
                   <a:srgbClr val="CCCCCC"/>
                 </a:solidFill>
               </a:rPr>
-              <a:t>    Medical imaging, lab reports — encoded locally, routed or analyzed remotely.</a:t>
+              <a:t>    Medical imaging, lab reports: encoded locally, routed or analyzed remotely via encrypted vectors.</a:t>
             </a:r>
           </a:p>
           <a:p>
@@ -4898,7 +4992,7 @@
                   <a:srgbClr val="FFFFFF"/>
                 </a:solidFill>
               </a:rPr>
-              <a:t>•  The approach is domain-agnostic</a:t>
+              <a:t>•  Domain-agnostic infrastructure</a:t>
             </a:r>
           </a:p>
           <a:p>
@@ -4913,7 +5007,7 @@
                   <a:srgbClr val="CCCCCC"/>
                 </a:solidFill>
               </a:rPr>
-              <a:t>    Finance, logistics, legal, industrial — wherever sensitive data meets central AI.</a:t>
+              <a:t>    Finance, logistics, legal, industrial: wherever sensitive data needs central AI without full-text export.</a:t>
             </a:r>
           </a:p>
         </p:txBody>
@@ -4958,7 +5052,7 @@
             <a:r>
               <a:rPr sz="1200">
                 <a:solidFill>
-                  <a:srgbClr val="9999AA"/>
+                  <a:srgbClr val="888899"/>
                 </a:solidFill>
               </a:rPr>
               <a:t>Reference: Gorbett, T., &amp; Jana, S. (2025). Characterizing Linear Alignment Across Language Models. arXiv:2603.18908</a:t>
@@ -4973,10 +5067,10 @@
             <a:r>
               <a:rPr sz="1200">
                 <a:solidFill>
-                  <a:srgbClr val="9999AA"/>
-                </a:solidFill>
-              </a:rPr>
-              <a:t>AI BEAVERS Founder Hackathon · House of AI Hamburg · June 6, 2026</a:t>
+                  <a:srgbClr val="888899"/>
+                </a:solidFill>
+              </a:rPr>
+              <a:t>AI BEAVERS Founder Hackathon  |  House of AI Hamburg  |  June 6, 2026</a:t>
             </a:r>
           </a:p>
         </p:txBody>
@@ -5006,12 +5100,12 @@
             <a:pPr algn="l">
               <a:defRPr sz="1000">
                 <a:solidFill>
-                  <a:srgbClr val="9999AA"/>
+                  <a:srgbClr val="888899"/>
                 </a:solidFill>
               </a:defRPr>
             </a:pPr>
             <a:r>
-              <a:t>DEMO — Research prototype only. Not medical advice, diagnosis, or treatment.</a:t>
+              <a:t>DEMO - Research prototype only. Not medical advice, diagnosis, or treatment.</a:t>
             </a:r>
           </a:p>
         </p:txBody>
